--- a/PPT-version/AI-Governance/AI-Governance-讲义.pptx
+++ b/PPT-version/AI-Governance/AI-Governance-讲义.pptx
@@ -13320,7 +13320,7 @@
                 </a:solidFill>
                 <a:latin typeface="Calibri"/>
               </a:rPr>
-              <a:t>纽约市 Local Law 144-21 实务解读（Deloitte、DCI Consulting）与 DLA Piper 对 2026 年市审计长报告的报道（2026-08-02 核实）</a:t>
+              <a:t>纽约市 Local Law 144-21 实务解读（Deloitte、DCI Consulting）与 DLA Piper 对纽约州审计长 2025-12 审计的报道（2026-08-02 核实）</a:t>
             </a:r>
           </a:p>
           <a:p>
@@ -23340,7 +23340,7 @@
                 </a:solidFill>
                 <a:latin typeface="Calibri"/>
               </a:rPr>
-              <a:t>科罗拉多 SB26-189（2026-05-14 签署、2027-01-01 生效）取代 2024 年的 SB24-205：高风险 AI 框架换成面向自动化决策技术的告知、解释与人工复核要求，部署方的影响评估与风险管理程序义务被删除。反向的例子是纽约市第 144 号地方法，一直没松：自动化雇佣决策工具要每年做独立偏见审计并公开摘要，使用前至少提前 10 个工作日告知。</a:t>
+              <a:t>科罗拉多 SB26-189（2026-05-14 签署、义务 2027-01-01 起）取代 2024 年的 SB24-205：高风险 AI 框架换成面向自动化决策技术的告知、解释与人工复核要求，部署方的影响评估与风险管理程序义务被删除。反向的例子是纽约市第 144 号地方法，一直没松：自动化雇佣决策工具要每年做独立偏见审计并公开摘要，使用前至少提前 10 个工作日告知。</a:t>
             </a:r>
           </a:p>
         </p:txBody>
@@ -26270,7 +26270,7 @@
                 </a:solidFill>
                 <a:latin typeface="Calibri"/>
               </a:rPr>
-              <a:t>美国那份还多要两格：与现有流程相比的收益与成本、重评的时间表与触发条件。欧盟第 27 条第 4 款写得很清楚：若这些在数据保护影响评估（Data Protection Impact Assessment，DPIA）里已经做过，基本权利影响评估（Fundamental Rights Impact Assessment，FRIA）是补足它，不是重做一份。第 3 款另有一条：做完还要连同模板报市场监管机构。这六格与 ISO/IEC 42005:2025（AI 系统影响评估指南，ISO/IEC 42001 的配套件）的评估文档要求同源，拿哪一份当模板都行。</a:t>
+              <a:t>美国那份还多要两格：与现有流程相比的收益与成本、重评的时间表与触发条件。欧盟第 27 条第 4 款写得很清楚：若这些在数据保护影响评估（Data Protection Impact Assessment，DPIA）里已经做过，基本权利影响评估（Fundamental Rights Impact Assessment，FRIA）可交叉引用其相关章节，不必重做。第 3 款另有一条：做完还要连同模板报市场监管机构。这六格与 ISO/IEC 42005:2025（AI 系统影响评估指南，ISO/IEC 42001 的配套件）的评估文档要求同源，拿哪一份当模板都行。</a:t>
             </a:r>
           </a:p>
         </p:txBody>
@@ -27477,7 +27477,7 @@
                 </a:solidFill>
                 <a:latin typeface="Calibri"/>
               </a:rPr>
-              <a:t>法条写的是补足数据保护影响评估，不是取代。</a:t>
+              <a:t>法条允许引用数据保护影响评估，不是取代。</a:t>
             </a:r>
           </a:p>
           <a:p>
@@ -28422,7 +28422,7 @@
                 </a:solidFill>
                 <a:latin typeface="Calibri"/>
               </a:rPr>
-              <a:t>A  不用重做，要补足。欧盟法案第 27 条第 4 款写明这是对数据保护影响评估的补充。两者盯的对象不同：一个盯数据怎么收怎么存，一个盯这个决定落到人身上会怎样。</a:t>
+              <a:t>A  不用重做，可引用。欧盟法案第 27 条第 4 款允许引用或纳入数据保护影响评估的相关部分。两者盯的对象不同：一个盯数据怎么收怎么存，一个盯这个决定落到人身上会怎样。</a:t>
             </a:r>
           </a:p>
           <a:p>
@@ -28752,7 +28752,7 @@
                 </a:solidFill>
                 <a:latin typeface="Calibri"/>
               </a:rPr>
-              <a:t>3　它补足数据保护影响评估，替不了评测</a:t>
+              <a:t>3　它可引用数据保护影响评估，替不了评测</a:t>
             </a:r>
           </a:p>
         </p:txBody>
@@ -32074,7 +32074,7 @@
                 </a:solidFill>
                 <a:latin typeface="Calibri"/>
               </a:rPr>
-              <a:t>欧盟人工智能法案更硬：高风险系统的部署方发现风险要立即通知并暂停使用。</a:t>
+              <a:t>欧盟人工智能法案更硬：高风险系统的部署方发现风险要及时通知并暂停使用。</a:t>
             </a:r>
           </a:p>
         </p:txBody>
@@ -34609,7 +34609,7 @@
                 </a:solidFill>
                 <a:latin typeface="Calibri"/>
               </a:rPr>
-              <a:t>A  事先指定，别临时找。NIST 的 AI 风险管理框架把停用单列一条：机制先建好、责任到人。欧盟法案对高风险系统的部署方更硬：发现风险要立即通知并暂停使用。</a:t>
+              <a:t>A  事先指定，别临时找。NIST 的 AI 风险管理框架把停用单列一条：机制先建好、责任到人。欧盟法案对高风险系统的部署方更硬：发现风险要及时通知并暂停使用。</a:t>
             </a:r>
           </a:p>
           <a:p>
@@ -46658,7 +46658,7 @@
                 </a:solidFill>
                 <a:latin typeface="Calibri"/>
               </a:rPr>
-              <a:t>法律基础本身也会变：科罗拉多那部 AI 法生效前后就被诉讼与新法改写过一轮。</a:t>
+              <a:t>法律基础本身也会变：科罗拉多那部 AI 法未及生效就被诉讼与新法改写过一轮。</a:t>
             </a:r>
           </a:p>
         </p:txBody>
@@ -47584,7 +47584,7 @@
                 </a:solidFill>
                 <a:latin typeface="Calibri"/>
               </a:rPr>
-              <a:t>A  科罗拉多那部 AI 法就是例子：原法被起诉、总检察长同意暂缓执法，新法 2026-05-14 签署、2027-01-01 起取代它。批条里要写清依据的是哪一版。</a:t>
+              <a:t>A  科罗拉多那部 AI 法就是例子：原法被起诉、总检察长同意暂缓执法，新法 2026-05-14 签署即取代它，义务 2027-01-01 起。批条里要写清依据的是哪一版。</a:t>
             </a:r>
           </a:p>
         </p:txBody>
